--- a/assets/pptx/catalog-774.pptx
+++ b/assets/pptx/catalog-774.pptx
@@ -3390,7 +3390,7 @@
                 <a:ea typeface="Ebrima"/>
                 <a:cs typeface="Ebrima"/>
               </a:rPr>
-              <a:t>ሃሳቤን ጠቅልለው ወደ ሞትህ (3x)</a:t>
+              <a:t>ሃሳቤን ጠቅልለው ወደ ሞትህ 3x</a:t>
             </a:r>
           </a:p>
         </p:txBody>
@@ -3725,7 +3725,7 @@
                 <a:ea typeface="Ebrima"/>
                 <a:cs typeface="Ebrima"/>
               </a:rPr>
-              <a:t>(4x)</a:t>
+              <a:t>4x</a:t>
             </a:r>
           </a:p>
         </p:txBody>
@@ -4194,7 +4194,7 @@
                 <a:ea typeface="Ebrima"/>
                 <a:cs typeface="Ebrima"/>
               </a:rPr>
-              <a:t>(2x)</a:t>
+              <a:t>2x</a:t>
             </a:r>
           </a:p>
         </p:txBody>
